--- a/RMS_Final.pptx
+++ b/RMS_Final.pptx
@@ -5,7 +5,7 @@
     <p:sldMasterId id="2147483648" r:id="rId1"/>
   </p:sldMasterIdLst>
   <p:notesMasterIdLst>
-    <p:notesMasterId r:id="rId10"/>
+    <p:notesMasterId r:id="rId9"/>
   </p:notesMasterIdLst>
   <p:sldIdLst>
     <p:sldId id="256" r:id="rId2"/>
@@ -15,7 +15,6 @@
     <p:sldId id="260" r:id="rId6"/>
     <p:sldId id="261" r:id="rId7"/>
     <p:sldId id="262" r:id="rId8"/>
-    <p:sldId id="263" r:id="rId9"/>
   </p:sldIdLst>
   <p:sldSz cx="9144000" cy="5143500" type="screen16x9"/>
   <p:notesSz cx="5143500" cy="9144000"/>
@@ -832,90 +831,6 @@
 </p:notes>
 </file>
 
-<file path=ppt/notesSlides/notesSlide8.xml><?xml version="1.0" encoding="utf-8"?>
-<p:notes xmlns:a="http://schemas.openxmlformats.org/drawingml/2006/main" xmlns:r="http://schemas.openxmlformats.org/officeDocument/2006/relationships" xmlns:p="http://schemas.openxmlformats.org/presentationml/2006/main">
-  <p:cSld>
-    <p:spTree>
-      <p:nvGrpSpPr>
-        <p:cNvPr id="1" name=""/>
-        <p:cNvGrpSpPr/>
-        <p:nvPr/>
-      </p:nvGrpSpPr>
-      <p:grpSpPr>
-        <a:xfrm>
-          <a:off x="0" y="0"/>
-          <a:ext cx="0" cy="0"/>
-          <a:chOff x="0" y="0"/>
-          <a:chExt cx="0" cy="0"/>
-        </a:xfrm>
-      </p:grpSpPr>
-      <p:sp>
-        <p:nvSpPr>
-          <p:cNvPr id="2" name="Slide Image Placeholder 1"/>
-          <p:cNvSpPr>
-            <a:spLocks noGrp="1" noRot="1" noChangeAspect="1"/>
-          </p:cNvSpPr>
-          <p:nvPr>
-            <p:ph type="sldImg"/>
-          </p:nvPr>
-        </p:nvSpPr>
-        <p:spPr/>
-      </p:sp>
-      <p:sp>
-        <p:nvSpPr>
-          <p:cNvPr id="3" name="Notes Placeholder 2"/>
-          <p:cNvSpPr>
-            <a:spLocks noGrp="1"/>
-          </p:cNvSpPr>
-          <p:nvPr>
-            <p:ph type="body" idx="1"/>
-          </p:nvPr>
-        </p:nvSpPr>
-        <p:spPr/>
-        <p:txBody>
-          <a:bodyPr/>
-          <a:lstStyle/>
-          <a:p>
-            <a:endParaRPr lang="en-US" dirty="0"/>
-          </a:p>
-        </p:txBody>
-      </p:sp>
-      <p:sp>
-        <p:nvSpPr>
-          <p:cNvPr id="4" name="Slide Number Placeholder 3"/>
-          <p:cNvSpPr>
-            <a:spLocks noGrp="1"/>
-          </p:cNvSpPr>
-          <p:nvPr>
-            <p:ph type="sldNum" sz="quarter" idx="10"/>
-          </p:nvPr>
-        </p:nvSpPr>
-        <p:spPr/>
-        <p:txBody>
-          <a:bodyPr/>
-          <a:lstStyle/>
-          <a:p>
-            <a:fld id="{F7021451-1387-4CA6-816F-3879F97B5CBC}" type="slidenum">
-              <a:rPr lang="en-US"/>
-              <a:t>8</a:t>
-            </a:fld>
-            <a:endParaRPr lang="en-US"/>
-          </a:p>
-        </p:txBody>
-      </p:sp>
-    </p:spTree>
-    <p:extLst>
-      <p:ext uri="{BB962C8B-B14F-4D97-AF65-F5344CB8AC3E}">
-        <p14:creationId xmlns:p14="http://schemas.microsoft.com/office/powerpoint/2010/main" val="1024086991"/>
-      </p:ext>
-    </p:extLst>
-  </p:cSld>
-  <p:clrMapOvr>
-    <a:masterClrMapping/>
-  </p:clrMapOvr>
-</p:notes>
-</file>
-
 <file path=ppt/slideLayouts/slideLayout1.xml><?xml version="1.0" encoding="utf-8"?>
 <p:sldLayout xmlns:a="http://schemas.openxmlformats.org/drawingml/2006/main" xmlns:r="http://schemas.openxmlformats.org/officeDocument/2006/relationships" xmlns:p="http://schemas.openxmlformats.org/presentationml/2006/main" preserve="1">
   <p:cSld name="DEFAULT">
@@ -1545,7 +1460,7 @@
                 <a:ea typeface="Calibri" pitchFamily="34" charset="-122"/>
                 <a:cs typeface="Calibri" pitchFamily="34" charset="-120"/>
               </a:rPr>
-              <a:t>[Your Name]  ·  [Student ID]  ·  Data Process and Software Modelling  ·  2026</a:t>
+              <a:t>Matty Luriz  ·  23206450  ·  Data Process and Software Modelling  ·  2026</a:t>
             </a:r>
             <a:endParaRPr lang="en-US" sz="1000" dirty="0"/>
           </a:p>
@@ -5026,1475 +4941,6 @@
 
 <file path=ppt/slides/slide6.xml><?xml version="1.0" encoding="utf-8"?>
 <p:sld xmlns:a="http://schemas.openxmlformats.org/drawingml/2006/main" xmlns:r="http://schemas.openxmlformats.org/officeDocument/2006/relationships" xmlns:p="http://schemas.openxmlformats.org/presentationml/2006/main">
-  <p:cSld name="Slide 1">
-    <p:bg>
-      <p:bgPr>
-        <a:solidFill>
-          <a:srgbClr val="F8FAFC"/>
-        </a:solidFill>
-      </p:bgPr>
-    </p:bg>
-    <p:spTree>
-      <p:nvGrpSpPr>
-        <p:cNvPr id="1" name=""/>
-        <p:cNvGrpSpPr/>
-        <p:nvPr/>
-      </p:nvGrpSpPr>
-      <p:grpSpPr>
-        <a:xfrm>
-          <a:off x="0" y="0"/>
-          <a:ext cx="0" cy="0"/>
-          <a:chOff x="0" y="0"/>
-          <a:chExt cx="0" cy="0"/>
-        </a:xfrm>
-      </p:grpSpPr>
-      <p:sp>
-        <p:nvSpPr>
-          <p:cNvPr id="2" name="Text 0"/>
-          <p:cNvSpPr/>
-          <p:nvPr/>
-        </p:nvSpPr>
-        <p:spPr>
-          <a:xfrm>
-            <a:off x="457200" y="228600"/>
-            <a:ext cx="8229600" cy="530352"/>
-          </a:xfrm>
-          <a:prstGeom prst="rect">
-            <a:avLst/>
-          </a:prstGeom>
-          <a:noFill/>
-          <a:ln/>
-        </p:spPr>
-        <p:txBody>
-          <a:bodyPr wrap="square" lIns="0" tIns="0" rIns="0" bIns="0" rtlCol="0" anchor="ctr"/>
-          <a:lstStyle/>
-          <a:p>
-            <a:pPr indent="0" marL="0">
-              <a:buNone/>
-            </a:pPr>
-            <a:r>
-              <a:rPr lang="en-US" sz="2800" b="1" dirty="0">
-                <a:solidFill>
-                  <a:srgbClr val="0D1B2A"/>
-                </a:solidFill>
-                <a:latin typeface="Calibri" pitchFamily="34" charset="0"/>
-                <a:ea typeface="Calibri" pitchFamily="34" charset="-122"/>
-                <a:cs typeface="Calibri" pitchFamily="34" charset="-120"/>
-              </a:rPr>
-              <a:t>C# Implementation</a:t>
-            </a:r>
-            <a:endParaRPr lang="en-US" sz="2800" dirty="0"/>
-          </a:p>
-        </p:txBody>
-      </p:sp>
-      <p:sp>
-        <p:nvSpPr>
-          <p:cNvPr id="3" name="Shape 1"/>
-          <p:cNvSpPr/>
-          <p:nvPr/>
-        </p:nvSpPr>
-        <p:spPr>
-          <a:xfrm>
-            <a:off x="457200" y="795528"/>
-            <a:ext cx="1005840" cy="64008"/>
-          </a:xfrm>
-          <a:prstGeom prst="rect">
-            <a:avLst/>
-          </a:prstGeom>
-          <a:solidFill>
-            <a:srgbClr val="0D9488"/>
-          </a:solidFill>
-          <a:ln w="12700">
-            <a:solidFill>
-              <a:srgbClr val="0D9488"/>
-            </a:solidFill>
-            <a:prstDash val="solid"/>
-          </a:ln>
-        </p:spPr>
-      </p:sp>
-      <p:sp>
-        <p:nvSpPr>
-          <p:cNvPr id="4" name="Text 2"/>
-          <p:cNvSpPr/>
-          <p:nvPr/>
-        </p:nvSpPr>
-        <p:spPr>
-          <a:xfrm>
-            <a:off x="457200" y="914400"/>
-            <a:ext cx="8229600" cy="256032"/>
-          </a:xfrm>
-          <a:prstGeom prst="rect">
-            <a:avLst/>
-          </a:prstGeom>
-          <a:noFill/>
-          <a:ln/>
-        </p:spPr>
-        <p:txBody>
-          <a:bodyPr wrap="square" lIns="0" tIns="0" rIns="0" bIns="0" rtlCol="0" anchor="ctr"/>
-          <a:lstStyle/>
-          <a:p>
-            <a:pPr indent="0" marL="0">
-              <a:buNone/>
-            </a:pPr>
-            <a:r>
-              <a:rPr lang="en-US" sz="1100" i="1" dirty="0">
-                <a:solidFill>
-                  <a:srgbClr val="64748B"/>
-                </a:solidFill>
-                <a:latin typeface="Calibri" pitchFamily="34" charset="0"/>
-                <a:ea typeface="Calibri" pitchFamily="34" charset="-122"/>
-                <a:cs typeface="Calibri" pitchFamily="34" charset="-120"/>
-              </a:rPr>
-              <a:t>UML → C# mapping  ·  Dependency injection  ·  Design decisions</a:t>
-            </a:r>
-            <a:endParaRPr lang="en-US" sz="1100" dirty="0"/>
-          </a:p>
-        </p:txBody>
-      </p:sp>
-      <p:sp>
-        <p:nvSpPr>
-          <p:cNvPr id="5" name="Shape 3"/>
-          <p:cNvSpPr/>
-          <p:nvPr/>
-        </p:nvSpPr>
-        <p:spPr>
-          <a:xfrm>
-            <a:off x="457200" y="1261872"/>
-            <a:ext cx="3977640" cy="329184"/>
-          </a:xfrm>
-          <a:prstGeom prst="rect">
-            <a:avLst/>
-          </a:prstGeom>
-          <a:solidFill>
-            <a:srgbClr val="DC2626"/>
-          </a:solidFill>
-          <a:ln w="12700">
-            <a:solidFill>
-              <a:srgbClr val="DC2626"/>
-            </a:solidFill>
-            <a:prstDash val="solid"/>
-          </a:ln>
-        </p:spPr>
-      </p:sp>
-      <p:sp>
-        <p:nvSpPr>
-          <p:cNvPr id="6" name="Text 4"/>
-          <p:cNvSpPr/>
-          <p:nvPr/>
-        </p:nvSpPr>
-        <p:spPr>
-          <a:xfrm>
-            <a:off x="457200" y="1261872"/>
-            <a:ext cx="3977640" cy="329184"/>
-          </a:xfrm>
-          <a:prstGeom prst="rect">
-            <a:avLst/>
-          </a:prstGeom>
-          <a:noFill/>
-          <a:ln/>
-        </p:spPr>
-        <p:txBody>
-          <a:bodyPr wrap="square" lIns="0" tIns="0" rIns="0" bIns="0" rtlCol="0" anchor="ctr"/>
-          <a:lstStyle/>
-          <a:p>
-            <a:pPr algn="ctr" indent="0" marL="0">
-              <a:buNone/>
-            </a:pPr>
-            <a:r>
-              <a:rPr lang="en-US" sz="1100" b="1" dirty="0">
-                <a:solidFill>
-                  <a:srgbClr val="FFFFFF"/>
-                </a:solidFill>
-                <a:latin typeface="Calibri" pitchFamily="34" charset="0"/>
-                <a:ea typeface="Calibri" pitchFamily="34" charset="-122"/>
-                <a:cs typeface="Calibri" pitchFamily="34" charset="-120"/>
-              </a:rPr>
-              <a:t>Before — Tight Coupling</a:t>
-            </a:r>
-            <a:endParaRPr lang="en-US" sz="1100" dirty="0"/>
-          </a:p>
-        </p:txBody>
-      </p:sp>
-      <p:sp>
-        <p:nvSpPr>
-          <p:cNvPr id="7" name="Shape 5"/>
-          <p:cNvSpPr/>
-          <p:nvPr/>
-        </p:nvSpPr>
-        <p:spPr>
-          <a:xfrm>
-            <a:off x="457200" y="1591056"/>
-            <a:ext cx="3977640" cy="1005840"/>
-          </a:xfrm>
-          <a:prstGeom prst="rect">
-            <a:avLst/>
-          </a:prstGeom>
-          <a:solidFill>
-            <a:srgbClr val="0D1B2A"/>
-          </a:solidFill>
-          <a:ln w="12700">
-            <a:solidFill>
-              <a:srgbClr val="0D1B2A"/>
-            </a:solidFill>
-            <a:prstDash val="solid"/>
-          </a:ln>
-        </p:spPr>
-      </p:sp>
-      <p:sp>
-        <p:nvSpPr>
-          <p:cNvPr id="8" name="Text 6"/>
-          <p:cNvSpPr/>
-          <p:nvPr/>
-        </p:nvSpPr>
-        <p:spPr>
-          <a:xfrm>
-            <a:off x="566928" y="1627632"/>
-            <a:ext cx="3749040" cy="914400"/>
-          </a:xfrm>
-          <a:prstGeom prst="rect">
-            <a:avLst/>
-          </a:prstGeom>
-          <a:noFill/>
-          <a:ln/>
-        </p:spPr>
-        <p:txBody>
-          <a:bodyPr wrap="square" lIns="0" tIns="0" rIns="0" bIns="0" rtlCol="0" anchor="t"/>
-          <a:lstStyle/>
-          <a:p>
-            <a:pPr indent="0" marL="0">
-              <a:buNone/>
-            </a:pPr>
-            <a:r>
-              <a:rPr lang="en-US" sz="950" dirty="0">
-                <a:solidFill>
-                  <a:srgbClr val="6B7280"/>
-                </a:solidFill>
-                <a:latin typeface="Consolas" pitchFamily="34" charset="0"/>
-                <a:ea typeface="Consolas" pitchFamily="34" charset="-122"/>
-                <a:cs typeface="Consolas" pitchFamily="34" charset="-120"/>
-              </a:rPr>
-              <a:t>// SalesAssociate creates Payment internally
-</a:t>
-            </a:r>
-            <a:pPr indent="0" marL="0">
-              <a:buNone/>
-            </a:pPr>
-            <a:r>
-              <a:rPr lang="en-US" sz="950" dirty="0">
-                <a:solidFill>
-                  <a:srgbClr val="90E0D8"/>
-                </a:solidFill>
-                <a:latin typeface="Consolas" pitchFamily="34" charset="0"/>
-                <a:ea typeface="Consolas" pitchFamily="34" charset="-122"/>
-                <a:cs typeface="Consolas" pitchFamily="34" charset="-120"/>
-              </a:rPr>
-              <a:t xml:space="preserve">Payment p </a:t>
-            </a:r>
-            <a:pPr indent="0" marL="0">
-              <a:buNone/>
-            </a:pPr>
-            <a:r>
-              <a:rPr lang="en-US" sz="950" dirty="0">
-                <a:solidFill>
-                  <a:srgbClr val="FFFFFF"/>
-                </a:solidFill>
-                <a:latin typeface="Consolas" pitchFamily="34" charset="0"/>
-                <a:ea typeface="Consolas" pitchFamily="34" charset="-122"/>
-                <a:cs typeface="Consolas" pitchFamily="34" charset="-120"/>
-              </a:rPr>
-              <a:t xml:space="preserve">= </a:t>
-            </a:r>
-            <a:pPr indent="0" marL="0">
-              <a:buNone/>
-            </a:pPr>
-            <a:r>
-              <a:rPr lang="en-US" sz="950" dirty="0">
-                <a:solidFill>
-                  <a:srgbClr val="F59E0B"/>
-                </a:solidFill>
-                <a:latin typeface="Consolas" pitchFamily="34" charset="0"/>
-                <a:ea typeface="Consolas" pitchFamily="34" charset="-122"/>
-                <a:cs typeface="Consolas" pitchFamily="34" charset="-120"/>
-              </a:rPr>
-              <a:t xml:space="preserve">new </a:t>
-            </a:r>
-            <a:pPr indent="0" marL="0">
-              <a:buNone/>
-            </a:pPr>
-            <a:r>
-              <a:rPr lang="en-US" sz="950" dirty="0">
-                <a:solidFill>
-                  <a:srgbClr val="90E0D8"/>
-                </a:solidFill>
-                <a:latin typeface="Consolas" pitchFamily="34" charset="0"/>
-                <a:ea typeface="Consolas" pitchFamily="34" charset="-122"/>
-                <a:cs typeface="Consolas" pitchFamily="34" charset="-120"/>
-              </a:rPr>
-              <a:t>Payment { amount = total };
-</a:t>
-            </a:r>
-            <a:pPr indent="0" marL="0">
-              <a:buNone/>
-            </a:pPr>
-            <a:r>
-              <a:rPr lang="en-US" sz="950" dirty="0">
-                <a:solidFill>
-                  <a:srgbClr val="90E0D8"/>
-                </a:solidFill>
-                <a:latin typeface="Consolas" pitchFamily="34" charset="0"/>
-                <a:ea typeface="Consolas" pitchFamily="34" charset="-122"/>
-                <a:cs typeface="Consolas" pitchFamily="34" charset="-120"/>
-              </a:rPr>
-              <a:t>bool ok = p.processPayment();</a:t>
-            </a:r>
-            <a:endParaRPr lang="en-US" sz="950" dirty="0"/>
-          </a:p>
-        </p:txBody>
-      </p:sp>
-      <p:sp>
-        <p:nvSpPr>
-          <p:cNvPr id="9" name="Text 7"/>
-          <p:cNvSpPr/>
-          <p:nvPr/>
-        </p:nvSpPr>
-        <p:spPr>
-          <a:xfrm>
-            <a:off x="457200" y="2596896"/>
-            <a:ext cx="3977640" cy="274320"/>
-          </a:xfrm>
-          <a:prstGeom prst="rect">
-            <a:avLst/>
-          </a:prstGeom>
-          <a:noFill/>
-          <a:ln/>
-        </p:spPr>
-        <p:txBody>
-          <a:bodyPr wrap="square" lIns="0" tIns="0" rIns="0" bIns="0" rtlCol="0" anchor="ctr"/>
-          <a:lstStyle/>
-          <a:p>
-            <a:pPr indent="0" marL="0">
-              <a:buNone/>
-            </a:pPr>
-            <a:r>
-              <a:rPr lang="en-US" sz="900" i="1" dirty="0">
-                <a:solidFill>
-                  <a:srgbClr val="DC2626"/>
-                </a:solidFill>
-                <a:latin typeface="Calibri" pitchFamily="34" charset="0"/>
-                <a:ea typeface="Calibri" pitchFamily="34" charset="-122"/>
-                <a:cs typeface="Calibri" pitchFamily="34" charset="-120"/>
-              </a:rPr>
-              <a:t>SalesAssociate depends on building Payment — high coupling</a:t>
-            </a:r>
-            <a:endParaRPr lang="en-US" sz="900" dirty="0"/>
-          </a:p>
-        </p:txBody>
-      </p:sp>
-      <p:sp>
-        <p:nvSpPr>
-          <p:cNvPr id="10" name="Shape 8"/>
-          <p:cNvSpPr/>
-          <p:nvPr/>
-        </p:nvSpPr>
-        <p:spPr>
-          <a:xfrm>
-            <a:off x="457200" y="2944368"/>
-            <a:ext cx="3977640" cy="329184"/>
-          </a:xfrm>
-          <a:prstGeom prst="rect">
-            <a:avLst/>
-          </a:prstGeom>
-          <a:solidFill>
-            <a:srgbClr val="16A34A"/>
-          </a:solidFill>
-          <a:ln w="12700">
-            <a:solidFill>
-              <a:srgbClr val="16A34A"/>
-            </a:solidFill>
-            <a:prstDash val="solid"/>
-          </a:ln>
-        </p:spPr>
-      </p:sp>
-      <p:sp>
-        <p:nvSpPr>
-          <p:cNvPr id="11" name="Text 9"/>
-          <p:cNvSpPr/>
-          <p:nvPr/>
-        </p:nvSpPr>
-        <p:spPr>
-          <a:xfrm>
-            <a:off x="457200" y="2944368"/>
-            <a:ext cx="3977640" cy="329184"/>
-          </a:xfrm>
-          <a:prstGeom prst="rect">
-            <a:avLst/>
-          </a:prstGeom>
-          <a:noFill/>
-          <a:ln/>
-        </p:spPr>
-        <p:txBody>
-          <a:bodyPr wrap="square" lIns="0" tIns="0" rIns="0" bIns="0" rtlCol="0" anchor="ctr"/>
-          <a:lstStyle/>
-          <a:p>
-            <a:pPr algn="ctr" indent="0" marL="0">
-              <a:buNone/>
-            </a:pPr>
-            <a:r>
-              <a:rPr lang="en-US" sz="1100" b="1" dirty="0">
-                <a:solidFill>
-                  <a:srgbClr val="FFFFFF"/>
-                </a:solidFill>
-                <a:latin typeface="Calibri" pitchFamily="34" charset="0"/>
-                <a:ea typeface="Calibri" pitchFamily="34" charset="-122"/>
-                <a:cs typeface="Calibri" pitchFamily="34" charset="-120"/>
-              </a:rPr>
-              <a:t>After — Low Coupling (Dependency Injection)</a:t>
-            </a:r>
-            <a:endParaRPr lang="en-US" sz="1100" dirty="0"/>
-          </a:p>
-        </p:txBody>
-      </p:sp>
-      <p:sp>
-        <p:nvSpPr>
-          <p:cNvPr id="12" name="Shape 10"/>
-          <p:cNvSpPr/>
-          <p:nvPr/>
-        </p:nvSpPr>
-        <p:spPr>
-          <a:xfrm>
-            <a:off x="457200" y="3273552"/>
-            <a:ext cx="3977640" cy="1005840"/>
-          </a:xfrm>
-          <a:prstGeom prst="rect">
-            <a:avLst/>
-          </a:prstGeom>
-          <a:solidFill>
-            <a:srgbClr val="0D1B2A"/>
-          </a:solidFill>
-          <a:ln w="12700">
-            <a:solidFill>
-              <a:srgbClr val="0D1B2A"/>
-            </a:solidFill>
-            <a:prstDash val="solid"/>
-          </a:ln>
-        </p:spPr>
-      </p:sp>
-      <p:sp>
-        <p:nvSpPr>
-          <p:cNvPr id="13" name="Text 11"/>
-          <p:cNvSpPr/>
-          <p:nvPr/>
-        </p:nvSpPr>
-        <p:spPr>
-          <a:xfrm>
-            <a:off x="566928" y="3310128"/>
-            <a:ext cx="3749040" cy="914400"/>
-          </a:xfrm>
-          <a:prstGeom prst="rect">
-            <a:avLst/>
-          </a:prstGeom>
-          <a:noFill/>
-          <a:ln/>
-        </p:spPr>
-        <p:txBody>
-          <a:bodyPr wrap="square" lIns="0" tIns="0" rIns="0" bIns="0" rtlCol="0" anchor="t"/>
-          <a:lstStyle/>
-          <a:p>
-            <a:pPr indent="0" marL="0">
-              <a:buNone/>
-            </a:pPr>
-            <a:r>
-              <a:rPr lang="en-US" sz="950" dirty="0">
-                <a:solidFill>
-                  <a:srgbClr val="6B7280"/>
-                </a:solidFill>
-                <a:latin typeface="Consolas" pitchFamily="34" charset="0"/>
-                <a:ea typeface="Consolas" pitchFamily="34" charset="-122"/>
-                <a:cs typeface="Consolas" pitchFamily="34" charset="-120"/>
-              </a:rPr>
-              <a:t>// Payment created in Setup(), passed in
-</a:t>
-            </a:r>
-            <a:pPr indent="0" marL="0">
-              <a:buNone/>
-            </a:pPr>
-            <a:r>
-              <a:rPr lang="en-US" sz="950" dirty="0">
-                <a:solidFill>
-                  <a:srgbClr val="90E0D8"/>
-                </a:solidFill>
-                <a:latin typeface="Consolas" pitchFamily="34" charset="0"/>
-                <a:ea typeface="Consolas" pitchFamily="34" charset="-122"/>
-                <a:cs typeface="Consolas" pitchFamily="34" charset="-120"/>
-              </a:rPr>
-              <a:t>sarah.processSale</a:t>
-            </a:r>
-            <a:pPr indent="0" marL="0">
-              <a:buNone/>
-            </a:pPr>
-            <a:r>
-              <a:rPr lang="en-US" sz="950" dirty="0">
-                <a:solidFill>
-                  <a:srgbClr val="FFFFFF"/>
-                </a:solidFill>
-                <a:latin typeface="Consolas" pitchFamily="34" charset="0"/>
-                <a:ea typeface="Consolas" pitchFamily="34" charset="-122"/>
-                <a:cs typeface="Consolas" pitchFamily="34" charset="-120"/>
-              </a:rPr>
-              <a:t>(
-</a:t>
-            </a:r>
-            <a:pPr indent="0" marL="0">
-              <a:buNone/>
-            </a:pPr>
-            <a:r>
-              <a:rPr lang="en-US" sz="950" dirty="0">
-                <a:solidFill>
-                  <a:srgbClr val="F59E0B"/>
-                </a:solidFill>
-                <a:latin typeface="Consolas" pitchFamily="34" charset="0"/>
-                <a:ea typeface="Consolas" pitchFamily="34" charset="-122"/>
-                <a:cs typeface="Consolas" pitchFamily="34" charset="-120"/>
-              </a:rPr>
-              <a:t xml:space="preserve">    demoSale, demoPayment, items</a:t>
-            </a:r>
-            <a:pPr indent="0" marL="0">
-              <a:buNone/>
-            </a:pPr>
-            <a:endParaRPr lang="en-US" sz="950" dirty="0"/>
-          </a:p>
-          <a:p>
-            <a:pPr indent="0" marL="0">
-              <a:buNone/>
-            </a:pPr>
-            <a:r>
-              <a:rPr lang="en-US" sz="950" dirty="0">
-                <a:solidFill>
-                  <a:srgbClr val="FFFFFF"/>
-                </a:solidFill>
-                <a:latin typeface="Consolas" pitchFamily="34" charset="0"/>
-                <a:ea typeface="Consolas" pitchFamily="34" charset="-122"/>
-                <a:cs typeface="Consolas" pitchFamily="34" charset="-120"/>
-              </a:rPr>
-              <a:t>);</a:t>
-            </a:r>
-            <a:endParaRPr lang="en-US" sz="950" dirty="0"/>
-          </a:p>
-        </p:txBody>
-      </p:sp>
-      <p:sp>
-        <p:nvSpPr>
-          <p:cNvPr id="14" name="Text 12"/>
-          <p:cNvSpPr/>
-          <p:nvPr/>
-        </p:nvSpPr>
-        <p:spPr>
-          <a:xfrm>
-            <a:off x="457200" y="4279392"/>
-            <a:ext cx="3977640" cy="274320"/>
-          </a:xfrm>
-          <a:prstGeom prst="rect">
-            <a:avLst/>
-          </a:prstGeom>
-          <a:noFill/>
-          <a:ln/>
-        </p:spPr>
-        <p:txBody>
-          <a:bodyPr wrap="square" lIns="0" tIns="0" rIns="0" bIns="0" rtlCol="0" anchor="ctr"/>
-          <a:lstStyle/>
-          <a:p>
-            <a:pPr indent="0" marL="0">
-              <a:buNone/>
-            </a:pPr>
-            <a:r>
-              <a:rPr lang="en-US" sz="900" i="1" dirty="0">
-                <a:solidFill>
-                  <a:srgbClr val="16A34A"/>
-                </a:solidFill>
-                <a:latin typeface="Calibri" pitchFamily="34" charset="0"/>
-                <a:ea typeface="Calibri" pitchFamily="34" charset="-122"/>
-                <a:cs typeface="Calibri" pitchFamily="34" charset="-120"/>
-              </a:rPr>
-              <a:t>No class creates its dependencies — each class does one job</a:t>
-            </a:r>
-            <a:endParaRPr lang="en-US" sz="900" dirty="0"/>
-          </a:p>
-        </p:txBody>
-      </p:sp>
-      <p:sp>
-        <p:nvSpPr>
-          <p:cNvPr id="15" name="Shape 13"/>
-          <p:cNvSpPr/>
-          <p:nvPr/>
-        </p:nvSpPr>
-        <p:spPr>
-          <a:xfrm>
-            <a:off x="4617720" y="1261872"/>
-            <a:ext cx="4251960" cy="868680"/>
-          </a:xfrm>
-          <a:prstGeom prst="rect">
-            <a:avLst/>
-          </a:prstGeom>
-          <a:solidFill>
-            <a:srgbClr val="FFFFFF"/>
-          </a:solidFill>
-          <a:ln w="12700">
-            <a:solidFill>
-              <a:srgbClr val="E2E8F0"/>
-            </a:solidFill>
-            <a:prstDash val="solid"/>
-          </a:ln>
-          <a:effectLst>
-            <a:outerShdw sx="100000" sy="100000" kx="0" ky="0" algn="bl" rotWithShape="0" blurRad="101600" dist="38100" dir="8100000">
-              <a:srgbClr val="000000">
-                <a:alpha val="12000"/>
-              </a:srgbClr>
-            </a:outerShdw>
-          </a:effectLst>
-        </p:spPr>
-      </p:sp>
-      <p:sp>
-        <p:nvSpPr>
-          <p:cNvPr id="16" name="Shape 14"/>
-          <p:cNvSpPr/>
-          <p:nvPr/>
-        </p:nvSpPr>
-        <p:spPr>
-          <a:xfrm>
-            <a:off x="4617720" y="1261872"/>
-            <a:ext cx="64008" cy="868680"/>
-          </a:xfrm>
-          <a:prstGeom prst="rect">
-            <a:avLst/>
-          </a:prstGeom>
-          <a:solidFill>
-            <a:srgbClr val="0D1B2A"/>
-          </a:solidFill>
-          <a:ln w="12700">
-            <a:solidFill>
-              <a:srgbClr val="0D1B2A"/>
-            </a:solidFill>
-            <a:prstDash val="solid"/>
-          </a:ln>
-        </p:spPr>
-      </p:sp>
-      <p:sp>
-        <p:nvSpPr>
-          <p:cNvPr id="17" name="Text 15"/>
-          <p:cNvSpPr/>
-          <p:nvPr/>
-        </p:nvSpPr>
-        <p:spPr>
-          <a:xfrm>
-            <a:off x="4754880" y="1335024"/>
-            <a:ext cx="2926080" cy="237744"/>
-          </a:xfrm>
-          <a:prstGeom prst="rect">
-            <a:avLst/>
-          </a:prstGeom>
-          <a:noFill/>
-          <a:ln/>
-        </p:spPr>
-        <p:txBody>
-          <a:bodyPr wrap="square" lIns="0" tIns="0" rIns="0" bIns="0" rtlCol="0" anchor="ctr"/>
-          <a:lstStyle/>
-          <a:p>
-            <a:pPr indent="0" marL="0">
-              <a:buNone/>
-            </a:pPr>
-            <a:r>
-              <a:rPr lang="en-US" sz="1100" b="1" dirty="0">
-                <a:solidFill>
-                  <a:srgbClr val="0D1B2A"/>
-                </a:solidFill>
-                <a:latin typeface="Calibri" pitchFamily="34" charset="0"/>
-                <a:ea typeface="Calibri" pitchFamily="34" charset="-122"/>
-                <a:cs typeface="Calibri" pitchFamily="34" charset="-120"/>
-              </a:rPr>
-              <a:t>UML → C# Mapping</a:t>
-            </a:r>
-            <a:endParaRPr lang="en-US" sz="1100" dirty="0"/>
-          </a:p>
-        </p:txBody>
-      </p:sp>
-      <p:sp>
-        <p:nvSpPr>
-          <p:cNvPr id="18" name="Text 16"/>
-          <p:cNvSpPr/>
-          <p:nvPr/>
-        </p:nvSpPr>
-        <p:spPr>
-          <a:xfrm>
-            <a:off x="4754880" y="1591056"/>
-            <a:ext cx="2560320" cy="457200"/>
-          </a:xfrm>
-          <a:prstGeom prst="rect">
-            <a:avLst/>
-          </a:prstGeom>
-          <a:noFill/>
-          <a:ln/>
-        </p:spPr>
-        <p:txBody>
-          <a:bodyPr wrap="square" lIns="0" tIns="0" rIns="0" bIns="0" rtlCol="0" anchor="t"/>
-          <a:lstStyle/>
-          <a:p>
-            <a:pPr indent="0" marL="0">
-              <a:buNone/>
-            </a:pPr>
-            <a:r>
-              <a:rPr lang="en-US" sz="850" dirty="0">
-                <a:solidFill>
-                  <a:srgbClr val="1E293B"/>
-                </a:solidFill>
-                <a:latin typeface="Calibri" pitchFamily="34" charset="0"/>
-                <a:ea typeface="Calibri" pitchFamily="34" charset="-122"/>
-                <a:cs typeface="Calibri" pitchFamily="34" charset="-120"/>
-              </a:rPr>
-              <a:t>All 15 classes, attributes, methods, and relationships from the UML Class Diagram map directly to C# classes. Every association, composition, and aggregation is preserved in code.</a:t>
-            </a:r>
-            <a:endParaRPr lang="en-US" sz="850" dirty="0"/>
-          </a:p>
-        </p:txBody>
-      </p:sp>
-      <p:sp>
-        <p:nvSpPr>
-          <p:cNvPr id="19" name="Shape 17"/>
-          <p:cNvSpPr/>
-          <p:nvPr/>
-        </p:nvSpPr>
-        <p:spPr>
-          <a:xfrm>
-            <a:off x="7388352" y="1335024"/>
-            <a:ext cx="1417320" cy="694944"/>
-          </a:xfrm>
-          <a:prstGeom prst="rect">
-            <a:avLst/>
-          </a:prstGeom>
-          <a:solidFill>
-            <a:srgbClr val="F0F9FF"/>
-          </a:solidFill>
-          <a:ln w="12700">
-            <a:solidFill>
-              <a:srgbClr val="CCFBF1"/>
-            </a:solidFill>
-            <a:prstDash val="solid"/>
-          </a:ln>
-        </p:spPr>
-      </p:sp>
-      <p:sp>
-        <p:nvSpPr>
-          <p:cNvPr id="20" name="Text 18"/>
-          <p:cNvSpPr/>
-          <p:nvPr/>
-        </p:nvSpPr>
-        <p:spPr>
-          <a:xfrm>
-            <a:off x="7424928" y="1371600"/>
-            <a:ext cx="1344168" cy="621792"/>
-          </a:xfrm>
-          <a:prstGeom prst="rect">
-            <a:avLst/>
-          </a:prstGeom>
-          <a:noFill/>
-          <a:ln/>
-        </p:spPr>
-        <p:txBody>
-          <a:bodyPr wrap="square" lIns="0" tIns="0" rIns="0" bIns="0" rtlCol="0" anchor="t"/>
-          <a:lstStyle/>
-          <a:p>
-            <a:pPr indent="0" marL="0">
-              <a:buNone/>
-            </a:pPr>
-            <a:r>
-              <a:rPr lang="en-US" sz="750" dirty="0">
-                <a:solidFill>
-                  <a:srgbClr val="0D9488"/>
-                </a:solidFill>
-                <a:latin typeface="Consolas" pitchFamily="34" charset="0"/>
-                <a:ea typeface="Consolas" pitchFamily="34" charset="-122"/>
-                <a:cs typeface="Consolas" pitchFamily="34" charset="-120"/>
-              </a:rPr>
-              <a:t>Order ◆──── OrderItem</a:t>
-            </a:r>
-            <a:endParaRPr lang="en-US" sz="750" dirty="0"/>
-          </a:p>
-          <a:p>
-            <a:pPr indent="0" marL="0">
-              <a:buNone/>
-            </a:pPr>
-            <a:r>
-              <a:rPr lang="en-US" sz="750" dirty="0">
-                <a:solidFill>
-                  <a:srgbClr val="0D9488"/>
-                </a:solidFill>
-                <a:latin typeface="Consolas" pitchFamily="34" charset="0"/>
-                <a:ea typeface="Consolas" pitchFamily="34" charset="-122"/>
-                <a:cs typeface="Consolas" pitchFamily="34" charset="-120"/>
-              </a:rPr>
-              <a:t>Sale  ◆──── SaleItem</a:t>
-            </a:r>
-            <a:endParaRPr lang="en-US" sz="750" dirty="0"/>
-          </a:p>
-        </p:txBody>
-      </p:sp>
-      <p:sp>
-        <p:nvSpPr>
-          <p:cNvPr id="21" name="Shape 19"/>
-          <p:cNvSpPr/>
-          <p:nvPr/>
-        </p:nvSpPr>
-        <p:spPr>
-          <a:xfrm>
-            <a:off x="4617720" y="2212848"/>
-            <a:ext cx="4251960" cy="868680"/>
-          </a:xfrm>
-          <a:prstGeom prst="rect">
-            <a:avLst/>
-          </a:prstGeom>
-          <a:solidFill>
-            <a:srgbClr val="FFFFFF"/>
-          </a:solidFill>
-          <a:ln w="12700">
-            <a:solidFill>
-              <a:srgbClr val="E2E8F0"/>
-            </a:solidFill>
-            <a:prstDash val="solid"/>
-          </a:ln>
-          <a:effectLst>
-            <a:outerShdw sx="100000" sy="100000" kx="0" ky="0" algn="bl" rotWithShape="0" blurRad="101600" dist="38100" dir="8100000">
-              <a:srgbClr val="000000">
-                <a:alpha val="12000"/>
-              </a:srgbClr>
-            </a:outerShdw>
-          </a:effectLst>
-        </p:spPr>
-      </p:sp>
-      <p:sp>
-        <p:nvSpPr>
-          <p:cNvPr id="22" name="Shape 20"/>
-          <p:cNvSpPr/>
-          <p:nvPr/>
-        </p:nvSpPr>
-        <p:spPr>
-          <a:xfrm>
-            <a:off x="4617720" y="2212848"/>
-            <a:ext cx="64008" cy="868680"/>
-          </a:xfrm>
-          <a:prstGeom prst="rect">
-            <a:avLst/>
-          </a:prstGeom>
-          <a:solidFill>
-            <a:srgbClr val="0D9488"/>
-          </a:solidFill>
-          <a:ln w="12700">
-            <a:solidFill>
-              <a:srgbClr val="0D9488"/>
-            </a:solidFill>
-            <a:prstDash val="solid"/>
-          </a:ln>
-        </p:spPr>
-      </p:sp>
-      <p:sp>
-        <p:nvSpPr>
-          <p:cNvPr id="23" name="Text 21"/>
-          <p:cNvSpPr/>
-          <p:nvPr/>
-        </p:nvSpPr>
-        <p:spPr>
-          <a:xfrm>
-            <a:off x="4754880" y="2286000"/>
-            <a:ext cx="2926080" cy="237744"/>
-          </a:xfrm>
-          <a:prstGeom prst="rect">
-            <a:avLst/>
-          </a:prstGeom>
-          <a:noFill/>
-          <a:ln/>
-        </p:spPr>
-        <p:txBody>
-          <a:bodyPr wrap="square" lIns="0" tIns="0" rIns="0" bIns="0" rtlCol="0" anchor="ctr"/>
-          <a:lstStyle/>
-          <a:p>
-            <a:pPr indent="0" marL="0">
-              <a:buNone/>
-            </a:pPr>
-            <a:r>
-              <a:rPr lang="en-US" sz="1100" b="1" dirty="0">
-                <a:solidFill>
-                  <a:srgbClr val="0D1B2A"/>
-                </a:solidFill>
-                <a:latin typeface="Calibri" pitchFamily="34" charset="0"/>
-                <a:ea typeface="Calibri" pitchFamily="34" charset="-122"/>
-                <a:cs typeface="Calibri" pitchFamily="34" charset="-120"/>
-              </a:rPr>
-              <a:t>Encapsulation</a:t>
-            </a:r>
-            <a:endParaRPr lang="en-US" sz="1100" dirty="0"/>
-          </a:p>
-        </p:txBody>
-      </p:sp>
-      <p:sp>
-        <p:nvSpPr>
-          <p:cNvPr id="24" name="Text 22"/>
-          <p:cNvSpPr/>
-          <p:nvPr/>
-        </p:nvSpPr>
-        <p:spPr>
-          <a:xfrm>
-            <a:off x="4754880" y="2542032"/>
-            <a:ext cx="2560320" cy="457200"/>
-          </a:xfrm>
-          <a:prstGeom prst="rect">
-            <a:avLst/>
-          </a:prstGeom>
-          <a:noFill/>
-          <a:ln/>
-        </p:spPr>
-        <p:txBody>
-          <a:bodyPr wrap="square" lIns="0" tIns="0" rIns="0" bIns="0" rtlCol="0" anchor="t"/>
-          <a:lstStyle/>
-          <a:p>
-            <a:pPr indent="0" marL="0">
-              <a:buNone/>
-            </a:pPr>
-            <a:r>
-              <a:rPr lang="en-US" sz="850" dirty="0">
-                <a:solidFill>
-                  <a:srgbClr val="1E293B"/>
-                </a:solidFill>
-                <a:latin typeface="Calibri" pitchFamily="34" charset="0"/>
-                <a:ea typeface="Calibri" pitchFamily="34" charset="-122"/>
-                <a:cs typeface="Calibri" pitchFamily="34" charset="-120"/>
-              </a:rPr>
-              <a:t>All fields are private with public properties. stockQuantity in Product is read-only externally — the only mutation path is updateStock(), which validates before applying.</a:t>
-            </a:r>
-            <a:endParaRPr lang="en-US" sz="850" dirty="0"/>
-          </a:p>
-        </p:txBody>
-      </p:sp>
-      <p:sp>
-        <p:nvSpPr>
-          <p:cNvPr id="25" name="Shape 23"/>
-          <p:cNvSpPr/>
-          <p:nvPr/>
-        </p:nvSpPr>
-        <p:spPr>
-          <a:xfrm>
-            <a:off x="7388352" y="2286000"/>
-            <a:ext cx="1417320" cy="694944"/>
-          </a:xfrm>
-          <a:prstGeom prst="rect">
-            <a:avLst/>
-          </a:prstGeom>
-          <a:solidFill>
-            <a:srgbClr val="F0F9FF"/>
-          </a:solidFill>
-          <a:ln w="12700">
-            <a:solidFill>
-              <a:srgbClr val="CCFBF1"/>
-            </a:solidFill>
-            <a:prstDash val="solid"/>
-          </a:ln>
-        </p:spPr>
-      </p:sp>
-      <p:sp>
-        <p:nvSpPr>
-          <p:cNvPr id="26" name="Text 24"/>
-          <p:cNvSpPr/>
-          <p:nvPr/>
-        </p:nvSpPr>
-        <p:spPr>
-          <a:xfrm>
-            <a:off x="7424928" y="2322576"/>
-            <a:ext cx="1344168" cy="621792"/>
-          </a:xfrm>
-          <a:prstGeom prst="rect">
-            <a:avLst/>
-          </a:prstGeom>
-          <a:noFill/>
-          <a:ln/>
-        </p:spPr>
-        <p:txBody>
-          <a:bodyPr wrap="square" lIns="0" tIns="0" rIns="0" bIns="0" rtlCol="0" anchor="t"/>
-          <a:lstStyle/>
-          <a:p>
-            <a:pPr indent="0" marL="0">
-              <a:buNone/>
-            </a:pPr>
-            <a:r>
-              <a:rPr lang="en-US" sz="750" dirty="0">
-                <a:solidFill>
-                  <a:srgbClr val="0D9488"/>
-                </a:solidFill>
-                <a:latin typeface="Consolas" pitchFamily="34" charset="0"/>
-                <a:ea typeface="Consolas" pitchFamily="34" charset="-122"/>
-                <a:cs typeface="Consolas" pitchFamily="34" charset="-120"/>
-              </a:rPr>
-              <a:t>private int _stockQuantity</a:t>
-            </a:r>
-            <a:endParaRPr lang="en-US" sz="750" dirty="0"/>
-          </a:p>
-          <a:p>
-            <a:pPr indent="0" marL="0">
-              <a:buNone/>
-            </a:pPr>
-            <a:r>
-              <a:rPr lang="en-US" sz="750" dirty="0">
-                <a:solidFill>
-                  <a:srgbClr val="0D9488"/>
-                </a:solidFill>
-                <a:latin typeface="Consolas" pitchFamily="34" charset="0"/>
-                <a:ea typeface="Consolas" pitchFamily="34" charset="-122"/>
-                <a:cs typeface="Consolas" pitchFamily="34" charset="-120"/>
-              </a:rPr>
-              <a:t>public void updateStock(int qty)</a:t>
-            </a:r>
-            <a:endParaRPr lang="en-US" sz="750" dirty="0"/>
-          </a:p>
-        </p:txBody>
-      </p:sp>
-      <p:sp>
-        <p:nvSpPr>
-          <p:cNvPr id="27" name="Shape 25"/>
-          <p:cNvSpPr/>
-          <p:nvPr/>
-        </p:nvSpPr>
-        <p:spPr>
-          <a:xfrm>
-            <a:off x="4617720" y="3163824"/>
-            <a:ext cx="4251960" cy="868680"/>
-          </a:xfrm>
-          <a:prstGeom prst="rect">
-            <a:avLst/>
-          </a:prstGeom>
-          <a:solidFill>
-            <a:srgbClr val="FFFFFF"/>
-          </a:solidFill>
-          <a:ln w="12700">
-            <a:solidFill>
-              <a:srgbClr val="E2E8F0"/>
-            </a:solidFill>
-            <a:prstDash val="solid"/>
-          </a:ln>
-          <a:effectLst>
-            <a:outerShdw sx="100000" sy="100000" kx="0" ky="0" algn="bl" rotWithShape="0" blurRad="101600" dist="38100" dir="8100000">
-              <a:srgbClr val="000000">
-                <a:alpha val="12000"/>
-              </a:srgbClr>
-            </a:outerShdw>
-          </a:effectLst>
-        </p:spPr>
-      </p:sp>
-      <p:sp>
-        <p:nvSpPr>
-          <p:cNvPr id="28" name="Shape 26"/>
-          <p:cNvSpPr/>
-          <p:nvPr/>
-        </p:nvSpPr>
-        <p:spPr>
-          <a:xfrm>
-            <a:off x="4617720" y="3163824"/>
-            <a:ext cx="64008" cy="868680"/>
-          </a:xfrm>
-          <a:prstGeom prst="rect">
-            <a:avLst/>
-          </a:prstGeom>
-          <a:solidFill>
-            <a:srgbClr val="0F766E"/>
-          </a:solidFill>
-          <a:ln w="12700">
-            <a:solidFill>
-              <a:srgbClr val="0F766E"/>
-            </a:solidFill>
-            <a:prstDash val="solid"/>
-          </a:ln>
-        </p:spPr>
-      </p:sp>
-      <p:sp>
-        <p:nvSpPr>
-          <p:cNvPr id="29" name="Text 27"/>
-          <p:cNvSpPr/>
-          <p:nvPr/>
-        </p:nvSpPr>
-        <p:spPr>
-          <a:xfrm>
-            <a:off x="4754880" y="3236976"/>
-            <a:ext cx="2926080" cy="237744"/>
-          </a:xfrm>
-          <a:prstGeom prst="rect">
-            <a:avLst/>
-          </a:prstGeom>
-          <a:noFill/>
-          <a:ln/>
-        </p:spPr>
-        <p:txBody>
-          <a:bodyPr wrap="square" lIns="0" tIns="0" rIns="0" bIns="0" rtlCol="0" anchor="ctr"/>
-          <a:lstStyle/>
-          <a:p>
-            <a:pPr indent="0" marL="0">
-              <a:buNone/>
-            </a:pPr>
-            <a:r>
-              <a:rPr lang="en-US" sz="1100" b="1" dirty="0">
-                <a:solidFill>
-                  <a:srgbClr val="0D1B2A"/>
-                </a:solidFill>
-                <a:latin typeface="Calibri" pitchFamily="34" charset="0"/>
-                <a:ea typeface="Calibri" pitchFamily="34" charset="-122"/>
-                <a:cs typeface="Calibri" pitchFamily="34" charset="-120"/>
-              </a:rPr>
-              <a:t>Inheritance</a:t>
-            </a:r>
-            <a:endParaRPr lang="en-US" sz="1100" dirty="0"/>
-          </a:p>
-        </p:txBody>
-      </p:sp>
-      <p:sp>
-        <p:nvSpPr>
-          <p:cNvPr id="30" name="Text 28"/>
-          <p:cNvSpPr/>
-          <p:nvPr/>
-        </p:nvSpPr>
-        <p:spPr>
-          <a:xfrm>
-            <a:off x="4754880" y="3493008"/>
-            <a:ext cx="2560320" cy="457200"/>
-          </a:xfrm>
-          <a:prstGeom prst="rect">
-            <a:avLst/>
-          </a:prstGeom>
-          <a:noFill/>
-          <a:ln/>
-        </p:spPr>
-        <p:txBody>
-          <a:bodyPr wrap="square" lIns="0" tIns="0" rIns="0" bIns="0" rtlCol="0" anchor="t"/>
-          <a:lstStyle/>
-          <a:p>
-            <a:pPr indent="0" marL="0">
-              <a:buNone/>
-            </a:pPr>
-            <a:r>
-              <a:rPr lang="en-US" sz="850" dirty="0">
-                <a:solidFill>
-                  <a:srgbClr val="1E293B"/>
-                </a:solidFill>
-                <a:latin typeface="Calibri" pitchFamily="34" charset="0"/>
-                <a:ea typeface="Calibri" pitchFamily="34" charset="-122"/>
-                <a:cs typeface="Calibri" pitchFamily="34" charset="-120"/>
-              </a:rPr>
-              <a:t>User is the base class. All five roles extend it via base(...) in their constructors — reusing login(), logout(), and shared fields in one place without duplication.</a:t>
-            </a:r>
-            <a:endParaRPr lang="en-US" sz="850" dirty="0"/>
-          </a:p>
-        </p:txBody>
-      </p:sp>
-      <p:sp>
-        <p:nvSpPr>
-          <p:cNvPr id="31" name="Shape 29"/>
-          <p:cNvSpPr/>
-          <p:nvPr/>
-        </p:nvSpPr>
-        <p:spPr>
-          <a:xfrm>
-            <a:off x="7388352" y="3236976"/>
-            <a:ext cx="1417320" cy="694944"/>
-          </a:xfrm>
-          <a:prstGeom prst="rect">
-            <a:avLst/>
-          </a:prstGeom>
-          <a:solidFill>
-            <a:srgbClr val="F0F9FF"/>
-          </a:solidFill>
-          <a:ln w="12700">
-            <a:solidFill>
-              <a:srgbClr val="CCFBF1"/>
-            </a:solidFill>
-            <a:prstDash val="solid"/>
-          </a:ln>
-        </p:spPr>
-      </p:sp>
-      <p:sp>
-        <p:nvSpPr>
-          <p:cNvPr id="32" name="Text 30"/>
-          <p:cNvSpPr/>
-          <p:nvPr/>
-        </p:nvSpPr>
-        <p:spPr>
-          <a:xfrm>
-            <a:off x="7424928" y="3273552"/>
-            <a:ext cx="1344168" cy="621792"/>
-          </a:xfrm>
-          <a:prstGeom prst="rect">
-            <a:avLst/>
-          </a:prstGeom>
-          <a:noFill/>
-          <a:ln/>
-        </p:spPr>
-        <p:txBody>
-          <a:bodyPr wrap="square" lIns="0" tIns="0" rIns="0" bIns="0" rtlCol="0" anchor="t"/>
-          <a:lstStyle/>
-          <a:p>
-            <a:pPr indent="0" marL="0">
-              <a:buNone/>
-            </a:pPr>
-            <a:r>
-              <a:rPr lang="en-US" sz="750" dirty="0">
-                <a:solidFill>
-                  <a:srgbClr val="0D9488"/>
-                </a:solidFill>
-                <a:latin typeface="Consolas" pitchFamily="34" charset="0"/>
-                <a:ea typeface="Consolas" pitchFamily="34" charset="-122"/>
-                <a:cs typeface="Consolas" pitchFamily="34" charset="-120"/>
-              </a:rPr>
-              <a:t>SalesAssociate : User</a:t>
-            </a:r>
-            <a:endParaRPr lang="en-US" sz="750" dirty="0"/>
-          </a:p>
-          <a:p>
-            <a:pPr indent="0" marL="0">
-              <a:buNone/>
-            </a:pPr>
-            <a:r>
-              <a:rPr lang="en-US" sz="750" dirty="0">
-                <a:solidFill>
-                  <a:srgbClr val="0D9488"/>
-                </a:solidFill>
-                <a:latin typeface="Consolas" pitchFamily="34" charset="0"/>
-                <a:ea typeface="Consolas" pitchFamily="34" charset="-122"/>
-                <a:cs typeface="Consolas" pitchFamily="34" charset="-120"/>
-              </a:rPr>
-              <a:t>Manager : User</a:t>
-            </a:r>
-            <a:endParaRPr lang="en-US" sz="750" dirty="0"/>
-          </a:p>
-        </p:txBody>
-      </p:sp>
-      <p:sp>
-        <p:nvSpPr>
-          <p:cNvPr id="33" name="Shape 31"/>
-          <p:cNvSpPr/>
-          <p:nvPr/>
-        </p:nvSpPr>
-        <p:spPr>
-          <a:xfrm>
-            <a:off x="4617720" y="4114800"/>
-            <a:ext cx="4251960" cy="868680"/>
-          </a:xfrm>
-          <a:prstGeom prst="rect">
-            <a:avLst/>
-          </a:prstGeom>
-          <a:solidFill>
-            <a:srgbClr val="FFFFFF"/>
-          </a:solidFill>
-          <a:ln w="12700">
-            <a:solidFill>
-              <a:srgbClr val="E2E8F0"/>
-            </a:solidFill>
-            <a:prstDash val="solid"/>
-          </a:ln>
-          <a:effectLst>
-            <a:outerShdw sx="100000" sy="100000" kx="0" ky="0" algn="bl" rotWithShape="0" blurRad="101600" dist="38100" dir="8100000">
-              <a:srgbClr val="000000">
-                <a:alpha val="12000"/>
-              </a:srgbClr>
-            </a:outerShdw>
-          </a:effectLst>
-        </p:spPr>
-      </p:sp>
-      <p:sp>
-        <p:nvSpPr>
-          <p:cNvPr id="34" name="Shape 32"/>
-          <p:cNvSpPr/>
-          <p:nvPr/>
-        </p:nvSpPr>
-        <p:spPr>
-          <a:xfrm>
-            <a:off x="4617720" y="4114800"/>
-            <a:ext cx="64008" cy="868680"/>
-          </a:xfrm>
-          <a:prstGeom prst="rect">
-            <a:avLst/>
-          </a:prstGeom>
-          <a:solidFill>
-            <a:srgbClr val="0369A1"/>
-          </a:solidFill>
-          <a:ln w="12700">
-            <a:solidFill>
-              <a:srgbClr val="0369A1"/>
-            </a:solidFill>
-            <a:prstDash val="solid"/>
-          </a:ln>
-        </p:spPr>
-      </p:sp>
-      <p:sp>
-        <p:nvSpPr>
-          <p:cNvPr id="35" name="Text 33"/>
-          <p:cNvSpPr/>
-          <p:nvPr/>
-        </p:nvSpPr>
-        <p:spPr>
-          <a:xfrm>
-            <a:off x="4754880" y="4187952"/>
-            <a:ext cx="2926080" cy="237744"/>
-          </a:xfrm>
-          <a:prstGeom prst="rect">
-            <a:avLst/>
-          </a:prstGeom>
-          <a:noFill/>
-          <a:ln/>
-        </p:spPr>
-        <p:txBody>
-          <a:bodyPr wrap="square" lIns="0" tIns="0" rIns="0" bIns="0" rtlCol="0" anchor="ctr"/>
-          <a:lstStyle/>
-          <a:p>
-            <a:pPr indent="0" marL="0">
-              <a:buNone/>
-            </a:pPr>
-            <a:r>
-              <a:rPr lang="en-US" sz="1100" b="1" dirty="0">
-                <a:solidFill>
-                  <a:srgbClr val="0D1B2A"/>
-                </a:solidFill>
-                <a:latin typeface="Calibri" pitchFamily="34" charset="0"/>
-                <a:ea typeface="Calibri" pitchFamily="34" charset="-122"/>
-                <a:cs typeface="Calibri" pitchFamily="34" charset="-120"/>
-              </a:rPr>
-              <a:t>Single Responsibility</a:t>
-            </a:r>
-            <a:endParaRPr lang="en-US" sz="1100" dirty="0"/>
-          </a:p>
-        </p:txBody>
-      </p:sp>
-      <p:sp>
-        <p:nvSpPr>
-          <p:cNvPr id="36" name="Text 34"/>
-          <p:cNvSpPr/>
-          <p:nvPr/>
-        </p:nvSpPr>
-        <p:spPr>
-          <a:xfrm>
-            <a:off x="4754880" y="4443984"/>
-            <a:ext cx="2560320" cy="457200"/>
-          </a:xfrm>
-          <a:prstGeom prst="rect">
-            <a:avLst/>
-          </a:prstGeom>
-          <a:noFill/>
-          <a:ln/>
-        </p:spPr>
-        <p:txBody>
-          <a:bodyPr wrap="square" lIns="0" tIns="0" rIns="0" bIns="0" rtlCol="0" anchor="t"/>
-          <a:lstStyle/>
-          <a:p>
-            <a:pPr indent="0" marL="0">
-              <a:buNone/>
-            </a:pPr>
-            <a:r>
-              <a:rPr lang="en-US" sz="850" dirty="0">
-                <a:solidFill>
-                  <a:srgbClr val="1E293B"/>
-                </a:solidFill>
-                <a:latin typeface="Calibri" pitchFamily="34" charset="0"/>
-                <a:ea typeface="Calibri" pitchFamily="34" charset="-122"/>
-                <a:cs typeface="Calibri" pitchFamily="34" charset="-120"/>
-              </a:rPr>
-              <a:t>Each class has one clearly defined job. Product manages stock. Payment handles payment logic. Report handles generation and export. No class bleeds into another's concern.</a:t>
-            </a:r>
-            <a:endParaRPr lang="en-US" sz="850" dirty="0"/>
-          </a:p>
-        </p:txBody>
-      </p:sp>
-      <p:sp>
-        <p:nvSpPr>
-          <p:cNvPr id="37" name="Shape 35"/>
-          <p:cNvSpPr/>
-          <p:nvPr/>
-        </p:nvSpPr>
-        <p:spPr>
-          <a:xfrm>
-            <a:off x="7388352" y="4187952"/>
-            <a:ext cx="1417320" cy="694944"/>
-          </a:xfrm>
-          <a:prstGeom prst="rect">
-            <a:avLst/>
-          </a:prstGeom>
-          <a:solidFill>
-            <a:srgbClr val="F0F9FF"/>
-          </a:solidFill>
-          <a:ln w="12700">
-            <a:solidFill>
-              <a:srgbClr val="CCFBF1"/>
-            </a:solidFill>
-            <a:prstDash val="solid"/>
-          </a:ln>
-        </p:spPr>
-      </p:sp>
-      <p:sp>
-        <p:nvSpPr>
-          <p:cNvPr id="38" name="Text 36"/>
-          <p:cNvSpPr/>
-          <p:nvPr/>
-        </p:nvSpPr>
-        <p:spPr>
-          <a:xfrm>
-            <a:off x="7424928" y="4224528"/>
-            <a:ext cx="1344168" cy="621792"/>
-          </a:xfrm>
-          <a:prstGeom prst="rect">
-            <a:avLst/>
-          </a:prstGeom>
-          <a:noFill/>
-          <a:ln/>
-        </p:spPr>
-        <p:txBody>
-          <a:bodyPr wrap="square" lIns="0" tIns="0" rIns="0" bIns="0" rtlCol="0" anchor="t"/>
-          <a:lstStyle/>
-          <a:p>
-            <a:pPr indent="0" marL="0">
-              <a:buNone/>
-            </a:pPr>
-            <a:r>
-              <a:rPr lang="en-US" sz="750" dirty="0">
-                <a:solidFill>
-                  <a:srgbClr val="0D9488"/>
-                </a:solidFill>
-                <a:latin typeface="Consolas" pitchFamily="34" charset="0"/>
-                <a:ea typeface="Consolas" pitchFamily="34" charset="-122"/>
-                <a:cs typeface="Consolas" pitchFamily="34" charset="-120"/>
-              </a:rPr>
-              <a:t>Product → stock only</a:t>
-            </a:r>
-            <a:endParaRPr lang="en-US" sz="750" dirty="0"/>
-          </a:p>
-          <a:p>
-            <a:pPr indent="0" marL="0">
-              <a:buNone/>
-            </a:pPr>
-            <a:r>
-              <a:rPr lang="en-US" sz="750" dirty="0">
-                <a:solidFill>
-                  <a:srgbClr val="0D9488"/>
-                </a:solidFill>
-                <a:latin typeface="Consolas" pitchFamily="34" charset="0"/>
-                <a:ea typeface="Consolas" pitchFamily="34" charset="-122"/>
-                <a:cs typeface="Consolas" pitchFamily="34" charset="-120"/>
-              </a:rPr>
-              <a:t>Payment → payment logic only</a:t>
-            </a:r>
-            <a:endParaRPr lang="en-US" sz="750" dirty="0"/>
-          </a:p>
-        </p:txBody>
-      </p:sp>
-    </p:spTree>
-  </p:cSld>
-  <p:clrMapOvr>
-    <a:masterClrMapping/>
-  </p:clrMapOvr>
-</p:sld>
-</file>
-
-<file path=ppt/slides/slide7.xml><?xml version="1.0" encoding="utf-8"?>
-<p:sld xmlns:a="http://schemas.openxmlformats.org/drawingml/2006/main" xmlns:r="http://schemas.openxmlformats.org/officeDocument/2006/relationships" xmlns:p="http://schemas.openxmlformats.org/presentationml/2006/main">
   <p:cSld name="Slide 7">
     <p:bg>
       <p:bgPr>
@@ -7030,7 +5476,7 @@
 </p:sld>
 </file>
 
-<file path=ppt/slides/slide8.xml><?xml version="1.0" encoding="utf-8"?>
+<file path=ppt/slides/slide7.xml><?xml version="1.0" encoding="utf-8"?>
 <p:sld xmlns:a="http://schemas.openxmlformats.org/drawingml/2006/main" xmlns:r="http://schemas.openxmlformats.org/officeDocument/2006/relationships" xmlns:p="http://schemas.openxmlformats.org/presentationml/2006/main">
   <p:cSld name="Slide 8">
     <p:bg>
